--- a/Docs/InterfaceWatchDog_사용법.pptx
+++ b/Docs/InterfaceWatchDog_사용법.pptx
@@ -326,7 +326,7 @@
                 <a:latin typeface="맑은 고딕"/>
                 <a:ea typeface="맑은 고딕"/>
               </a:rPr>
-              <a:t>ERWEKA / TabmachineIF 인터페이스 감시 시스템  |  v1.3.0</a:t>
+              <a:t>ERWEKA / TabmachineIF 인터페이스 감시 시스템  |  v1.4.0</a:t>
             </a:r>
           </a:p>
         </p:txBody>
